--- a/VOIS_Major_Project_PPT.pptx
+++ b/VOIS_Major_Project_PPT.pptx
@@ -196,7 +196,7 @@
           <p:cNvPr id="2" name="Header Placeholder 1">
             <a:extLst>
               <a:ext uri="{FF2B5EF4-FFF2-40B4-BE49-F238E27FC236}">
-                <a16:creationId xmlns:a16="http://schemas.microsoft.com/office/drawing/2014/main" xmlns="" id="{B76F666D-E0C2-435B-BAA8-9287F9E5D38A}"/>
+                <a16:creationId xmlns="" xmlns:a16="http://schemas.microsoft.com/office/drawing/2014/main" id="{B76F666D-E0C2-435B-BAA8-9287F9E5D38A}"/>
               </a:ext>
             </a:extLst>
           </p:cNvPr>
@@ -233,7 +233,7 @@
           <p:cNvPr id="3" name="Date Placeholder 2">
             <a:extLst>
               <a:ext uri="{FF2B5EF4-FFF2-40B4-BE49-F238E27FC236}">
-                <a16:creationId xmlns:a16="http://schemas.microsoft.com/office/drawing/2014/main" xmlns="" id="{19FEBCAF-CB3F-4928-91AA-D61472F880C0}"/>
+                <a16:creationId xmlns="" xmlns:a16="http://schemas.microsoft.com/office/drawing/2014/main" id="{19FEBCAF-CB3F-4928-91AA-D61472F880C0}"/>
               </a:ext>
             </a:extLst>
           </p:cNvPr>
@@ -274,7 +274,7 @@
           <p:cNvPr id="4" name="Footer Placeholder 3">
             <a:extLst>
               <a:ext uri="{FF2B5EF4-FFF2-40B4-BE49-F238E27FC236}">
-                <a16:creationId xmlns:a16="http://schemas.microsoft.com/office/drawing/2014/main" xmlns="" id="{69256698-63C6-4CCC-81CB-EA5604C30F1E}"/>
+                <a16:creationId xmlns="" xmlns:a16="http://schemas.microsoft.com/office/drawing/2014/main" id="{69256698-63C6-4CCC-81CB-EA5604C30F1E}"/>
               </a:ext>
             </a:extLst>
           </p:cNvPr>
@@ -311,7 +311,7 @@
           <p:cNvPr id="5" name="Slide Number Placeholder 4">
             <a:extLst>
               <a:ext uri="{FF2B5EF4-FFF2-40B4-BE49-F238E27FC236}">
-                <a16:creationId xmlns:a16="http://schemas.microsoft.com/office/drawing/2014/main" xmlns="" id="{B2467FDA-05D7-4760-A373-5D6AEAAF4278}"/>
+                <a16:creationId xmlns="" xmlns:a16="http://schemas.microsoft.com/office/drawing/2014/main" id="{B2467FDA-05D7-4760-A373-5D6AEAAF4278}"/>
               </a:ext>
             </a:extLst>
           </p:cNvPr>
@@ -3596,7 +3596,7 @@
           <p:cNvPr id="11" name="Text Placeholder 10">
             <a:extLst>
               <a:ext uri="{FF2B5EF4-FFF2-40B4-BE49-F238E27FC236}">
-                <a16:creationId xmlns:a16="http://schemas.microsoft.com/office/drawing/2014/main" xmlns="" id="{6FDA3C6F-5F6A-4D64-8BFE-AFFF58B1A047}"/>
+                <a16:creationId xmlns="" xmlns:a16="http://schemas.microsoft.com/office/drawing/2014/main" id="{6FDA3C6F-5F6A-4D64-8BFE-AFFF58B1A047}"/>
               </a:ext>
             </a:extLst>
           </p:cNvPr>
@@ -3654,7 +3654,7 @@
           <p:cNvPr id="15" name="Hexagon 14">
             <a:extLst>
               <a:ext uri="{FF2B5EF4-FFF2-40B4-BE49-F238E27FC236}">
-                <a16:creationId xmlns:a16="http://schemas.microsoft.com/office/drawing/2014/main" xmlns="" id="{AC159667-7690-4645-986D-BE501438455F}"/>
+                <a16:creationId xmlns="" xmlns:a16="http://schemas.microsoft.com/office/drawing/2014/main" id="{AC159667-7690-4645-986D-BE501438455F}"/>
               </a:ext>
             </a:extLst>
           </p:cNvPr>
@@ -3706,7 +3706,7 @@
           <p:cNvPr id="16" name="Hexagon 15">
             <a:extLst>
               <a:ext uri="{FF2B5EF4-FFF2-40B4-BE49-F238E27FC236}">
-                <a16:creationId xmlns:a16="http://schemas.microsoft.com/office/drawing/2014/main" xmlns="" id="{54667EE4-E77F-453B-BF8B-B1EE2AE80715}"/>
+                <a16:creationId xmlns="" xmlns:a16="http://schemas.microsoft.com/office/drawing/2014/main" id="{54667EE4-E77F-453B-BF8B-B1EE2AE80715}"/>
               </a:ext>
             </a:extLst>
           </p:cNvPr>
@@ -3758,7 +3758,7 @@
           <p:cNvPr id="17" name="Hexagon 16">
             <a:extLst>
               <a:ext uri="{FF2B5EF4-FFF2-40B4-BE49-F238E27FC236}">
-                <a16:creationId xmlns:a16="http://schemas.microsoft.com/office/drawing/2014/main" xmlns="" id="{FC050232-A229-425F-BFC8-D50374F2D171}"/>
+                <a16:creationId xmlns="" xmlns:a16="http://schemas.microsoft.com/office/drawing/2014/main" id="{FC050232-A229-425F-BFC8-D50374F2D171}"/>
               </a:ext>
             </a:extLst>
           </p:cNvPr>
@@ -3810,7 +3810,7 @@
           <p:cNvPr id="18" name="Hexagon 17">
             <a:extLst>
               <a:ext uri="{FF2B5EF4-FFF2-40B4-BE49-F238E27FC236}">
-                <a16:creationId xmlns:a16="http://schemas.microsoft.com/office/drawing/2014/main" xmlns="" id="{53E4EBC7-340A-43A5-9E23-4B73A6F700B6}"/>
+                <a16:creationId xmlns="" xmlns:a16="http://schemas.microsoft.com/office/drawing/2014/main" id="{53E4EBC7-340A-43A5-9E23-4B73A6F700B6}"/>
               </a:ext>
             </a:extLst>
           </p:cNvPr>
@@ -3862,7 +3862,7 @@
           <p:cNvPr id="19" name="Picture Placeholder 18">
             <a:extLst>
               <a:ext uri="{FF2B5EF4-FFF2-40B4-BE49-F238E27FC236}">
-                <a16:creationId xmlns:a16="http://schemas.microsoft.com/office/drawing/2014/main" xmlns="" id="{1ED0E31A-F0A3-481D-8D9C-E3C4531FD21D}"/>
+                <a16:creationId xmlns="" xmlns:a16="http://schemas.microsoft.com/office/drawing/2014/main" id="{1ED0E31A-F0A3-481D-8D9C-E3C4531FD21D}"/>
               </a:ext>
             </a:extLst>
           </p:cNvPr>
@@ -4063,7 +4063,7 @@
           <p:cNvPr id="2" name="Title 1">
             <a:extLst>
               <a:ext uri="{FF2B5EF4-FFF2-40B4-BE49-F238E27FC236}">
-                <a16:creationId xmlns:a16="http://schemas.microsoft.com/office/drawing/2014/main" xmlns="" id="{03E68100-C56F-4515-A4FD-3F301797E78F}"/>
+                <a16:creationId xmlns="" xmlns:a16="http://schemas.microsoft.com/office/drawing/2014/main" id="{03E68100-C56F-4515-A4FD-3F301797E78F}"/>
               </a:ext>
             </a:extLst>
           </p:cNvPr>
@@ -4149,7 +4149,7 @@
           <p:cNvPr id="10" name="Oval 9">
             <a:extLst>
               <a:ext uri="{FF2B5EF4-FFF2-40B4-BE49-F238E27FC236}">
-                <a16:creationId xmlns:a16="http://schemas.microsoft.com/office/drawing/2014/main" xmlns="" id="{24FAA9D0-7C9C-4043-9931-A15819ABB9B5}"/>
+                <a16:creationId xmlns="" xmlns:a16="http://schemas.microsoft.com/office/drawing/2014/main" id="{24FAA9D0-7C9C-4043-9931-A15819ABB9B5}"/>
               </a:ext>
             </a:extLst>
           </p:cNvPr>
@@ -4205,7 +4205,7 @@
           <p:cNvPr id="14" name="Oval 13">
             <a:extLst>
               <a:ext uri="{FF2B5EF4-FFF2-40B4-BE49-F238E27FC236}">
-                <a16:creationId xmlns:a16="http://schemas.microsoft.com/office/drawing/2014/main" xmlns="" id="{E232AB2D-843E-4B5F-8793-6A263DA356BB}"/>
+                <a16:creationId xmlns="" xmlns:a16="http://schemas.microsoft.com/office/drawing/2014/main" id="{E232AB2D-843E-4B5F-8793-6A263DA356BB}"/>
               </a:ext>
             </a:extLst>
           </p:cNvPr>
@@ -4261,7 +4261,7 @@
           <p:cNvPr id="16" name="Oval 15">
             <a:extLst>
               <a:ext uri="{FF2B5EF4-FFF2-40B4-BE49-F238E27FC236}">
-                <a16:creationId xmlns:a16="http://schemas.microsoft.com/office/drawing/2014/main" xmlns="" id="{FA75A12B-C399-4072-BD69-D872D2C2AD1F}"/>
+                <a16:creationId xmlns="" xmlns:a16="http://schemas.microsoft.com/office/drawing/2014/main" id="{FA75A12B-C399-4072-BD69-D872D2C2AD1F}"/>
               </a:ext>
             </a:extLst>
           </p:cNvPr>
@@ -4317,7 +4317,7 @@
           <p:cNvPr id="23" name="Picture Placeholder 22">
             <a:extLst>
               <a:ext uri="{FF2B5EF4-FFF2-40B4-BE49-F238E27FC236}">
-                <a16:creationId xmlns:a16="http://schemas.microsoft.com/office/drawing/2014/main" xmlns="" id="{423AE48B-50E9-4BEA-B66A-B2D2B9CCFE9C}"/>
+                <a16:creationId xmlns="" xmlns:a16="http://schemas.microsoft.com/office/drawing/2014/main" id="{423AE48B-50E9-4BEA-B66A-B2D2B9CCFE9C}"/>
               </a:ext>
             </a:extLst>
           </p:cNvPr>
@@ -4469,7 +4469,7 @@
           <p:cNvPr id="27" name="Text Placeholder 26">
             <a:extLst>
               <a:ext uri="{FF2B5EF4-FFF2-40B4-BE49-F238E27FC236}">
-                <a16:creationId xmlns:a16="http://schemas.microsoft.com/office/drawing/2014/main" xmlns="" id="{282D3E62-6D1A-4E9D-BE54-2EED9BF429A4}"/>
+                <a16:creationId xmlns="" xmlns:a16="http://schemas.microsoft.com/office/drawing/2014/main" id="{282D3E62-6D1A-4E9D-BE54-2EED9BF429A4}"/>
               </a:ext>
             </a:extLst>
           </p:cNvPr>
@@ -4550,7 +4550,7 @@
           <p:cNvPr id="8" name="Title 1">
             <a:extLst>
               <a:ext uri="{FF2B5EF4-FFF2-40B4-BE49-F238E27FC236}">
-                <a16:creationId xmlns:a16="http://schemas.microsoft.com/office/drawing/2014/main" xmlns="" id="{DEB8F0E5-B89F-48AD-87BD-534EA9463CD3}"/>
+                <a16:creationId xmlns="" xmlns:a16="http://schemas.microsoft.com/office/drawing/2014/main" id="{DEB8F0E5-B89F-48AD-87BD-534EA9463CD3}"/>
               </a:ext>
             </a:extLst>
           </p:cNvPr>
@@ -4636,7 +4636,7 @@
           <p:cNvPr id="10" name="Text Placeholder 26">
             <a:extLst>
               <a:ext uri="{FF2B5EF4-FFF2-40B4-BE49-F238E27FC236}">
-                <a16:creationId xmlns:a16="http://schemas.microsoft.com/office/drawing/2014/main" xmlns="" id="{4AA38E8C-A334-4183-8ABC-112B8517F487}"/>
+                <a16:creationId xmlns="" xmlns:a16="http://schemas.microsoft.com/office/drawing/2014/main" id="{4AA38E8C-A334-4183-8ABC-112B8517F487}"/>
               </a:ext>
             </a:extLst>
           </p:cNvPr>
@@ -4714,7 +4714,7 @@
           <p:cNvPr id="19" name="Rectangle 18">
             <a:extLst>
               <a:ext uri="{FF2B5EF4-FFF2-40B4-BE49-F238E27FC236}">
-                <a16:creationId xmlns:a16="http://schemas.microsoft.com/office/drawing/2014/main" xmlns="" id="{B80624A4-5116-4AAF-8C31-C25D1DB16FEC}"/>
+                <a16:creationId xmlns="" xmlns:a16="http://schemas.microsoft.com/office/drawing/2014/main" id="{B80624A4-5116-4AAF-8C31-C25D1DB16FEC}"/>
               </a:ext>
             </a:extLst>
           </p:cNvPr>
@@ -4766,7 +4766,7 @@
           <p:cNvPr id="21" name="Rectangle 20">
             <a:extLst>
               <a:ext uri="{FF2B5EF4-FFF2-40B4-BE49-F238E27FC236}">
-                <a16:creationId xmlns:a16="http://schemas.microsoft.com/office/drawing/2014/main" xmlns="" id="{1D07EC8A-6024-4DEA-9C4D-AE4228E17854}"/>
+                <a16:creationId xmlns="" xmlns:a16="http://schemas.microsoft.com/office/drawing/2014/main" id="{1D07EC8A-6024-4DEA-9C4D-AE4228E17854}"/>
               </a:ext>
             </a:extLst>
           </p:cNvPr>
@@ -4818,7 +4818,7 @@
           <p:cNvPr id="23" name="Rectangle 22">
             <a:extLst>
               <a:ext uri="{FF2B5EF4-FFF2-40B4-BE49-F238E27FC236}">
-                <a16:creationId xmlns:a16="http://schemas.microsoft.com/office/drawing/2014/main" xmlns="" id="{D1C8FAEF-DF78-48CC-AEEF-F9B802055C05}"/>
+                <a16:creationId xmlns="" xmlns:a16="http://schemas.microsoft.com/office/drawing/2014/main" id="{D1C8FAEF-DF78-48CC-AEEF-F9B802055C05}"/>
               </a:ext>
             </a:extLst>
           </p:cNvPr>
@@ -4870,7 +4870,7 @@
           <p:cNvPr id="11" name="Picture Placeholder 10">
             <a:extLst>
               <a:ext uri="{FF2B5EF4-FFF2-40B4-BE49-F238E27FC236}">
-                <a16:creationId xmlns:a16="http://schemas.microsoft.com/office/drawing/2014/main" xmlns="" id="{566F72D6-AEEE-4CF3-8136-F6782F1E489E}"/>
+                <a16:creationId xmlns="" xmlns:a16="http://schemas.microsoft.com/office/drawing/2014/main" id="{566F72D6-AEEE-4CF3-8136-F6782F1E489E}"/>
               </a:ext>
             </a:extLst>
           </p:cNvPr>
@@ -5056,7 +5056,7 @@
           <p:cNvPr id="2" name="Title 1">
             <a:extLst>
               <a:ext uri="{FF2B5EF4-FFF2-40B4-BE49-F238E27FC236}">
-                <a16:creationId xmlns:a16="http://schemas.microsoft.com/office/drawing/2014/main" xmlns="" id="{459DADC7-BE21-4434-A6E4-BAF809005389}"/>
+                <a16:creationId xmlns="" xmlns:a16="http://schemas.microsoft.com/office/drawing/2014/main" id="{459DADC7-BE21-4434-A6E4-BAF809005389}"/>
               </a:ext>
             </a:extLst>
           </p:cNvPr>
@@ -5325,7 +5325,7 @@
           <p:cNvPr id="39" name="Picture Placeholder 38">
             <a:extLst>
               <a:ext uri="{FF2B5EF4-FFF2-40B4-BE49-F238E27FC236}">
-                <a16:creationId xmlns:a16="http://schemas.microsoft.com/office/drawing/2014/main" xmlns="" id="{CF421413-161E-4B36-B693-FB38DF14EDAB}"/>
+                <a16:creationId xmlns="" xmlns:a16="http://schemas.microsoft.com/office/drawing/2014/main" id="{CF421413-161E-4B36-B693-FB38DF14EDAB}"/>
               </a:ext>
             </a:extLst>
           </p:cNvPr>
@@ -5428,7 +5428,7 @@
           <p:cNvPr id="38" name="Picture Placeholder 37">
             <a:extLst>
               <a:ext uri="{FF2B5EF4-FFF2-40B4-BE49-F238E27FC236}">
-                <a16:creationId xmlns:a16="http://schemas.microsoft.com/office/drawing/2014/main" xmlns="" id="{B5D207AE-9C9C-410A-9F31-2402BAD6DDFF}"/>
+                <a16:creationId xmlns="" xmlns:a16="http://schemas.microsoft.com/office/drawing/2014/main" id="{B5D207AE-9C9C-410A-9F31-2402BAD6DDFF}"/>
               </a:ext>
             </a:extLst>
           </p:cNvPr>
@@ -5531,7 +5531,7 @@
           <p:cNvPr id="40" name="Picture Placeholder 39">
             <a:extLst>
               <a:ext uri="{FF2B5EF4-FFF2-40B4-BE49-F238E27FC236}">
-                <a16:creationId xmlns:a16="http://schemas.microsoft.com/office/drawing/2014/main" xmlns="" id="{DE3344FC-C4DE-481F-9C31-667EDD563C47}"/>
+                <a16:creationId xmlns="" xmlns:a16="http://schemas.microsoft.com/office/drawing/2014/main" id="{DE3344FC-C4DE-481F-9C31-667EDD563C47}"/>
               </a:ext>
             </a:extLst>
           </p:cNvPr>
@@ -5634,7 +5634,7 @@
           <p:cNvPr id="41" name="Picture Placeholder 40">
             <a:extLst>
               <a:ext uri="{FF2B5EF4-FFF2-40B4-BE49-F238E27FC236}">
-                <a16:creationId xmlns:a16="http://schemas.microsoft.com/office/drawing/2014/main" xmlns="" id="{59094D7D-3613-49C1-BB58-A65B41A9738D}"/>
+                <a16:creationId xmlns="" xmlns:a16="http://schemas.microsoft.com/office/drawing/2014/main" id="{59094D7D-3613-49C1-BB58-A65B41A9738D}"/>
               </a:ext>
             </a:extLst>
           </p:cNvPr>
@@ -5737,7 +5737,7 @@
           <p:cNvPr id="8" name="Title 1">
             <a:extLst>
               <a:ext uri="{FF2B5EF4-FFF2-40B4-BE49-F238E27FC236}">
-                <a16:creationId xmlns:a16="http://schemas.microsoft.com/office/drawing/2014/main" xmlns="" id="{69FE87B7-32A4-4C7F-9AAF-37688E640456}"/>
+                <a16:creationId xmlns="" xmlns:a16="http://schemas.microsoft.com/office/drawing/2014/main" id="{69FE87B7-32A4-4C7F-9AAF-37688E640456}"/>
               </a:ext>
             </a:extLst>
           </p:cNvPr>
@@ -5783,7 +5783,7 @@
           <p:cNvPr id="9" name="Hexagon 8">
             <a:extLst>
               <a:ext uri="{FF2B5EF4-FFF2-40B4-BE49-F238E27FC236}">
-                <a16:creationId xmlns:a16="http://schemas.microsoft.com/office/drawing/2014/main" xmlns="" id="{476CA45F-A66A-4AD8-A004-10DB55A5D7B2}"/>
+                <a16:creationId xmlns="" xmlns:a16="http://schemas.microsoft.com/office/drawing/2014/main" id="{476CA45F-A66A-4AD8-A004-10DB55A5D7B2}"/>
               </a:ext>
             </a:extLst>
           </p:cNvPr>
@@ -5835,7 +5835,7 @@
           <p:cNvPr id="10" name="Hexagon 9">
             <a:extLst>
               <a:ext uri="{FF2B5EF4-FFF2-40B4-BE49-F238E27FC236}">
-                <a16:creationId xmlns:a16="http://schemas.microsoft.com/office/drawing/2014/main" xmlns="" id="{27A66A3D-2437-4015-9F5F-380C4D23D83C}"/>
+                <a16:creationId xmlns="" xmlns:a16="http://schemas.microsoft.com/office/drawing/2014/main" id="{27A66A3D-2437-4015-9F5F-380C4D23D83C}"/>
               </a:ext>
             </a:extLst>
           </p:cNvPr>
@@ -5887,7 +5887,7 @@
           <p:cNvPr id="11" name="Hexagon 10">
             <a:extLst>
               <a:ext uri="{FF2B5EF4-FFF2-40B4-BE49-F238E27FC236}">
-                <a16:creationId xmlns:a16="http://schemas.microsoft.com/office/drawing/2014/main" xmlns="" id="{FFB14F3B-E7EF-4546-8D74-71FFB45C77C0}"/>
+                <a16:creationId xmlns="" xmlns:a16="http://schemas.microsoft.com/office/drawing/2014/main" id="{FFB14F3B-E7EF-4546-8D74-71FFB45C77C0}"/>
               </a:ext>
             </a:extLst>
           </p:cNvPr>
@@ -5939,7 +5939,7 @@
           <p:cNvPr id="23" name="Text Placeholder 22">
             <a:extLst>
               <a:ext uri="{FF2B5EF4-FFF2-40B4-BE49-F238E27FC236}">
-                <a16:creationId xmlns:a16="http://schemas.microsoft.com/office/drawing/2014/main" xmlns="" id="{591F943B-ED0D-49A1-844A-E23BA9A4871B}"/>
+                <a16:creationId xmlns="" xmlns:a16="http://schemas.microsoft.com/office/drawing/2014/main" id="{591F943B-ED0D-49A1-844A-E23BA9A4871B}"/>
               </a:ext>
             </a:extLst>
           </p:cNvPr>
@@ -5988,7 +5988,7 @@
           <p:cNvPr id="24" name="Text Placeholder 22">
             <a:extLst>
               <a:ext uri="{FF2B5EF4-FFF2-40B4-BE49-F238E27FC236}">
-                <a16:creationId xmlns:a16="http://schemas.microsoft.com/office/drawing/2014/main" xmlns="" id="{9AC6B9A8-053C-4828-B705-901C6018F30D}"/>
+                <a16:creationId xmlns="" xmlns:a16="http://schemas.microsoft.com/office/drawing/2014/main" id="{9AC6B9A8-053C-4828-B705-901C6018F30D}"/>
               </a:ext>
             </a:extLst>
           </p:cNvPr>
@@ -6037,7 +6037,7 @@
           <p:cNvPr id="27" name="Text Placeholder 22">
             <a:extLst>
               <a:ext uri="{FF2B5EF4-FFF2-40B4-BE49-F238E27FC236}">
-                <a16:creationId xmlns:a16="http://schemas.microsoft.com/office/drawing/2014/main" xmlns="" id="{BBA6FD52-E179-41F8-AE78-9AF3D65F28B6}"/>
+                <a16:creationId xmlns="" xmlns:a16="http://schemas.microsoft.com/office/drawing/2014/main" id="{BBA6FD52-E179-41F8-AE78-9AF3D65F28B6}"/>
               </a:ext>
             </a:extLst>
           </p:cNvPr>
@@ -6086,7 +6086,7 @@
           <p:cNvPr id="28" name="Text Placeholder 22">
             <a:extLst>
               <a:ext uri="{FF2B5EF4-FFF2-40B4-BE49-F238E27FC236}">
-                <a16:creationId xmlns:a16="http://schemas.microsoft.com/office/drawing/2014/main" xmlns="" id="{C49A82AB-D328-4DB0-841B-186884119EBF}"/>
+                <a16:creationId xmlns="" xmlns:a16="http://schemas.microsoft.com/office/drawing/2014/main" id="{C49A82AB-D328-4DB0-841B-186884119EBF}"/>
               </a:ext>
             </a:extLst>
           </p:cNvPr>
@@ -6135,7 +6135,7 @@
           <p:cNvPr id="29" name="Text Placeholder 22">
             <a:extLst>
               <a:ext uri="{FF2B5EF4-FFF2-40B4-BE49-F238E27FC236}">
-                <a16:creationId xmlns:a16="http://schemas.microsoft.com/office/drawing/2014/main" xmlns="" id="{84E23D5D-9866-48F9-8E08-DD2DBE4C4E32}"/>
+                <a16:creationId xmlns="" xmlns:a16="http://schemas.microsoft.com/office/drawing/2014/main" id="{84E23D5D-9866-48F9-8E08-DD2DBE4C4E32}"/>
               </a:ext>
             </a:extLst>
           </p:cNvPr>
@@ -6184,7 +6184,7 @@
           <p:cNvPr id="30" name="Text Placeholder 22">
             <a:extLst>
               <a:ext uri="{FF2B5EF4-FFF2-40B4-BE49-F238E27FC236}">
-                <a16:creationId xmlns:a16="http://schemas.microsoft.com/office/drawing/2014/main" xmlns="" id="{E671C9E6-A1A5-4EE5-8642-94AA7635DB05}"/>
+                <a16:creationId xmlns="" xmlns:a16="http://schemas.microsoft.com/office/drawing/2014/main" id="{E671C9E6-A1A5-4EE5-8642-94AA7635DB05}"/>
               </a:ext>
             </a:extLst>
           </p:cNvPr>
@@ -6233,7 +6233,7 @@
           <p:cNvPr id="31" name="Text Placeholder 22">
             <a:extLst>
               <a:ext uri="{FF2B5EF4-FFF2-40B4-BE49-F238E27FC236}">
-                <a16:creationId xmlns:a16="http://schemas.microsoft.com/office/drawing/2014/main" xmlns="" id="{DF6BB5C9-B678-435A-830F-4C10EB1A957C}"/>
+                <a16:creationId xmlns="" xmlns:a16="http://schemas.microsoft.com/office/drawing/2014/main" id="{DF6BB5C9-B678-435A-830F-4C10EB1A957C}"/>
               </a:ext>
             </a:extLst>
           </p:cNvPr>
@@ -6282,7 +6282,7 @@
           <p:cNvPr id="32" name="Text Placeholder 22">
             <a:extLst>
               <a:ext uri="{FF2B5EF4-FFF2-40B4-BE49-F238E27FC236}">
-                <a16:creationId xmlns:a16="http://schemas.microsoft.com/office/drawing/2014/main" xmlns="" id="{1861EC87-A9E2-4FC3-B8BC-06C520B8A17F}"/>
+                <a16:creationId xmlns="" xmlns:a16="http://schemas.microsoft.com/office/drawing/2014/main" id="{1861EC87-A9E2-4FC3-B8BC-06C520B8A17F}"/>
               </a:ext>
             </a:extLst>
           </p:cNvPr>
@@ -6331,7 +6331,7 @@
           <p:cNvPr id="33" name="Text Placeholder 22">
             <a:extLst>
               <a:ext uri="{FF2B5EF4-FFF2-40B4-BE49-F238E27FC236}">
-                <a16:creationId xmlns:a16="http://schemas.microsoft.com/office/drawing/2014/main" xmlns="" id="{FC3EDE91-631F-4947-94DC-557685FD23E0}"/>
+                <a16:creationId xmlns="" xmlns:a16="http://schemas.microsoft.com/office/drawing/2014/main" id="{FC3EDE91-631F-4947-94DC-557685FD23E0}"/>
               </a:ext>
             </a:extLst>
           </p:cNvPr>
@@ -6380,7 +6380,7 @@
           <p:cNvPr id="34" name="Text Placeholder 22">
             <a:extLst>
               <a:ext uri="{FF2B5EF4-FFF2-40B4-BE49-F238E27FC236}">
-                <a16:creationId xmlns:a16="http://schemas.microsoft.com/office/drawing/2014/main" xmlns="" id="{8FDDBEF4-1329-49DF-B043-D51B34F5EE34}"/>
+                <a16:creationId xmlns="" xmlns:a16="http://schemas.microsoft.com/office/drawing/2014/main" id="{8FDDBEF4-1329-49DF-B043-D51B34F5EE34}"/>
               </a:ext>
             </a:extLst>
           </p:cNvPr>
@@ -6429,7 +6429,7 @@
           <p:cNvPr id="37" name="Picture Placeholder 36">
             <a:extLst>
               <a:ext uri="{FF2B5EF4-FFF2-40B4-BE49-F238E27FC236}">
-                <a16:creationId xmlns:a16="http://schemas.microsoft.com/office/drawing/2014/main" xmlns="" id="{FBDB3FD3-4F52-4E28-B639-5F73070E47D9}"/>
+                <a16:creationId xmlns="" xmlns:a16="http://schemas.microsoft.com/office/drawing/2014/main" id="{FBDB3FD3-4F52-4E28-B639-5F73070E47D9}"/>
               </a:ext>
             </a:extLst>
           </p:cNvPr>
@@ -6586,7 +6586,7 @@
           <p:cNvPr id="22" name="Picture Placeholder 21">
             <a:extLst>
               <a:ext uri="{FF2B5EF4-FFF2-40B4-BE49-F238E27FC236}">
-                <a16:creationId xmlns:a16="http://schemas.microsoft.com/office/drawing/2014/main" xmlns="" id="{DFA57703-9E4A-48E0-A123-3A5EDC76475C}"/>
+                <a16:creationId xmlns="" xmlns:a16="http://schemas.microsoft.com/office/drawing/2014/main" id="{DFA57703-9E4A-48E0-A123-3A5EDC76475C}"/>
               </a:ext>
             </a:extLst>
           </p:cNvPr>
@@ -6623,7 +6623,7 @@
           <p:cNvPr id="2" name="Rectangle 1" descr="Tall office building looking up">
             <a:extLst>
               <a:ext uri="{FF2B5EF4-FFF2-40B4-BE49-F238E27FC236}">
-                <a16:creationId xmlns:a16="http://schemas.microsoft.com/office/drawing/2014/main" xmlns="" id="{AF7FA146-2A75-4EA7-A9AD-EBCE6F17FB42}"/>
+                <a16:creationId xmlns="" xmlns:a16="http://schemas.microsoft.com/office/drawing/2014/main" id="{AF7FA146-2A75-4EA7-A9AD-EBCE6F17FB42}"/>
               </a:ext>
             </a:extLst>
           </p:cNvPr>
@@ -6679,7 +6679,7 @@
           <p:cNvPr id="24" name="Text Placeholder 23">
             <a:extLst>
               <a:ext uri="{FF2B5EF4-FFF2-40B4-BE49-F238E27FC236}">
-                <a16:creationId xmlns:a16="http://schemas.microsoft.com/office/drawing/2014/main" xmlns="" id="{340C15AA-E296-48AE-857F-0589EEA69DC6}"/>
+                <a16:creationId xmlns="" xmlns:a16="http://schemas.microsoft.com/office/drawing/2014/main" id="{340C15AA-E296-48AE-857F-0589EEA69DC6}"/>
               </a:ext>
             </a:extLst>
           </p:cNvPr>
@@ -6732,7 +6732,7 @@
           <p:cNvPr id="6" name="Title 1">
             <a:extLst>
               <a:ext uri="{FF2B5EF4-FFF2-40B4-BE49-F238E27FC236}">
-                <a16:creationId xmlns:a16="http://schemas.microsoft.com/office/drawing/2014/main" xmlns="" id="{162BE5D7-9E35-49F8-A8E4-2093183A6404}"/>
+                <a16:creationId xmlns="" xmlns:a16="http://schemas.microsoft.com/office/drawing/2014/main" id="{162BE5D7-9E35-49F8-A8E4-2093183A6404}"/>
               </a:ext>
             </a:extLst>
           </p:cNvPr>
@@ -9166,7 +9166,7 @@
           <p:cNvPr id="18" name="Date Placeholder 3">
             <a:extLst>
               <a:ext uri="{FF2B5EF4-FFF2-40B4-BE49-F238E27FC236}">
-                <a16:creationId xmlns:a16="http://schemas.microsoft.com/office/drawing/2014/main" xmlns="" id="{2CD6B789-4B66-4BD0-9623-80E9542A65FE}"/>
+                <a16:creationId xmlns="" xmlns:a16="http://schemas.microsoft.com/office/drawing/2014/main" id="{2CD6B789-4B66-4BD0-9623-80E9542A65FE}"/>
               </a:ext>
             </a:extLst>
           </p:cNvPr>
@@ -9304,7 +9304,7 @@
           <p:cNvPr id="29" name="Footer Placeholder 4">
             <a:extLst>
               <a:ext uri="{FF2B5EF4-FFF2-40B4-BE49-F238E27FC236}">
-                <a16:creationId xmlns:a16="http://schemas.microsoft.com/office/drawing/2014/main" xmlns="" id="{A3BB5234-44A4-4506-BD19-5808475EBB7F}"/>
+                <a16:creationId xmlns="" xmlns:a16="http://schemas.microsoft.com/office/drawing/2014/main" id="{A3BB5234-44A4-4506-BD19-5808475EBB7F}"/>
               </a:ext>
             </a:extLst>
           </p:cNvPr>
@@ -9437,7 +9437,7 @@
           <p:cNvPr id="30" name="Slide Number Placeholder 5">
             <a:extLst>
               <a:ext uri="{FF2B5EF4-FFF2-40B4-BE49-F238E27FC236}">
-                <a16:creationId xmlns:a16="http://schemas.microsoft.com/office/drawing/2014/main" xmlns="" id="{68D89618-7EE9-46BF-BEAC-45E6F98ACA1A}"/>
+                <a16:creationId xmlns="" xmlns:a16="http://schemas.microsoft.com/office/drawing/2014/main" id="{68D89618-7EE9-46BF-BEAC-45E6F98ACA1A}"/>
               </a:ext>
             </a:extLst>
           </p:cNvPr>
@@ -10029,7 +10029,7 @@
           <p:cNvPr id="2" name="Text Placeholder 1">
             <a:extLst>
               <a:ext uri="{FF2B5EF4-FFF2-40B4-BE49-F238E27FC236}">
-                <a16:creationId xmlns:a16="http://schemas.microsoft.com/office/drawing/2014/main" xmlns="" id="{7201737A-B873-4D1D-8A41-5ABF5184BC8F}"/>
+                <a16:creationId xmlns="" xmlns:a16="http://schemas.microsoft.com/office/drawing/2014/main" id="{7201737A-B873-4D1D-8A41-5ABF5184BC8F}"/>
               </a:ext>
             </a:extLst>
           </p:cNvPr>
@@ -10090,7 +10090,7 @@
           <p:cNvPr id="4" name="Title 3">
             <a:extLst>
               <a:ext uri="{FF2B5EF4-FFF2-40B4-BE49-F238E27FC236}">
-                <a16:creationId xmlns:a16="http://schemas.microsoft.com/office/drawing/2014/main" xmlns="" id="{92056599-CDAA-4367-BEF8-31D6E32518C8}"/>
+                <a16:creationId xmlns="" xmlns:a16="http://schemas.microsoft.com/office/drawing/2014/main" id="{92056599-CDAA-4367-BEF8-31D6E32518C8}"/>
               </a:ext>
             </a:extLst>
           </p:cNvPr>
@@ -10129,7 +10129,7 @@
           <p:cNvPr id="15" name="Text Placeholder 1">
             <a:extLst>
               <a:ext uri="{FF2B5EF4-FFF2-40B4-BE49-F238E27FC236}">
-                <a16:creationId xmlns:a16="http://schemas.microsoft.com/office/drawing/2014/main" xmlns="" id="{824B8A32-9AB3-457E-82E1-C85D3203CE35}"/>
+                <a16:creationId xmlns="" xmlns:a16="http://schemas.microsoft.com/office/drawing/2014/main" id="{824B8A32-9AB3-457E-82E1-C85D3203CE35}"/>
               </a:ext>
             </a:extLst>
           </p:cNvPr>
@@ -10385,7 +10385,7 @@
           <p:cNvPr id="6" name="Picture 5">
             <a:extLst>
               <a:ext uri="{FF2B5EF4-FFF2-40B4-BE49-F238E27FC236}">
-                <a16:creationId xmlns:a16="http://schemas.microsoft.com/office/drawing/2014/main" xmlns="" id="{E30DEFF0-8DEE-4B0B-9B30-675FE9E288A2}"/>
+                <a16:creationId xmlns="" xmlns:a16="http://schemas.microsoft.com/office/drawing/2014/main" id="{E30DEFF0-8DEE-4B0B-9B30-675FE9E288A2}"/>
               </a:ext>
             </a:extLst>
           </p:cNvPr>
@@ -10414,7 +10414,7 @@
           <p:cNvPr id="3" name="TextBox 2">
             <a:extLst>
               <a:ext uri="{FF2B5EF4-FFF2-40B4-BE49-F238E27FC236}">
-                <a16:creationId xmlns:a16="http://schemas.microsoft.com/office/drawing/2014/main" xmlns="" id="{17F04107-8754-E47D-3375-529E689711FA}"/>
+                <a16:creationId xmlns="" xmlns:a16="http://schemas.microsoft.com/office/drawing/2014/main" id="{17F04107-8754-E47D-3375-529E689711FA}"/>
               </a:ext>
             </a:extLst>
           </p:cNvPr>
@@ -11027,7 +11027,7 @@
         <p:cNvPr id="1" name="">
           <a:extLst>
             <a:ext uri="{FF2B5EF4-FFF2-40B4-BE49-F238E27FC236}">
-              <a16:creationId xmlns:a16="http://schemas.microsoft.com/office/drawing/2014/main" xmlns="" id="{20030C45-6A74-29AD-A5C0-D5F36592DB69}"/>
+              <a16:creationId xmlns="" xmlns:a16="http://schemas.microsoft.com/office/drawing/2014/main" id="{20030C45-6A74-29AD-A5C0-D5F36592DB69}"/>
             </a:ext>
           </a:extLst>
         </p:cNvPr>
@@ -11047,7 +11047,7 @@
           <p:cNvPr id="5" name="Picture 4">
             <a:extLst>
               <a:ext uri="{FF2B5EF4-FFF2-40B4-BE49-F238E27FC236}">
-                <a16:creationId xmlns:a16="http://schemas.microsoft.com/office/drawing/2014/main" xmlns="" id="{9E7611FF-D6E5-400F-ED75-6F5531CFA957}"/>
+                <a16:creationId xmlns="" xmlns:a16="http://schemas.microsoft.com/office/drawing/2014/main" id="{9E7611FF-D6E5-400F-ED75-6F5531CFA957}"/>
               </a:ext>
             </a:extLst>
           </p:cNvPr>
@@ -11076,7 +11076,7 @@
           <p:cNvPr id="4" name="Title 3">
             <a:extLst>
               <a:ext uri="{FF2B5EF4-FFF2-40B4-BE49-F238E27FC236}">
-                <a16:creationId xmlns:a16="http://schemas.microsoft.com/office/drawing/2014/main" xmlns="" id="{99E35150-35BD-1B1F-9A8C-890DBFDF3B54}"/>
+                <a16:creationId xmlns="" xmlns:a16="http://schemas.microsoft.com/office/drawing/2014/main" id="{99E35150-35BD-1B1F-9A8C-890DBFDF3B54}"/>
               </a:ext>
             </a:extLst>
           </p:cNvPr>
@@ -11112,7 +11112,7 @@
           <p:cNvPr id="7" name="Text Placeholder 30">
             <a:extLst>
               <a:ext uri="{FF2B5EF4-FFF2-40B4-BE49-F238E27FC236}">
-                <a16:creationId xmlns:a16="http://schemas.microsoft.com/office/drawing/2014/main" xmlns="" id="{5A2A9BCE-A757-223C-2A3D-44341FB27A61}"/>
+                <a16:creationId xmlns="" xmlns:a16="http://schemas.microsoft.com/office/drawing/2014/main" id="{5A2A9BCE-A757-223C-2A3D-44341FB27A61}"/>
               </a:ext>
             </a:extLst>
           </p:cNvPr>
@@ -11368,7 +11368,7 @@
           <p:cNvPr id="8" name="Text Placeholder 30">
             <a:extLst>
               <a:ext uri="{FF2B5EF4-FFF2-40B4-BE49-F238E27FC236}">
-                <a16:creationId xmlns:a16="http://schemas.microsoft.com/office/drawing/2014/main" xmlns="" id="{1EED58A7-2CD5-1355-8D1D-DD62A1ED8CB5}"/>
+                <a16:creationId xmlns="" xmlns:a16="http://schemas.microsoft.com/office/drawing/2014/main" id="{1EED58A7-2CD5-1355-8D1D-DD62A1ED8CB5}"/>
               </a:ext>
             </a:extLst>
           </p:cNvPr>
@@ -11624,7 +11624,7 @@
           <p:cNvPr id="10" name="Text Placeholder 1">
             <a:extLst>
               <a:ext uri="{FF2B5EF4-FFF2-40B4-BE49-F238E27FC236}">
-                <a16:creationId xmlns:a16="http://schemas.microsoft.com/office/drawing/2014/main" xmlns="" id="{F85C769B-425A-FE3B-E47A-3B747985DC52}"/>
+                <a16:creationId xmlns="" xmlns:a16="http://schemas.microsoft.com/office/drawing/2014/main" id="{F85C769B-425A-FE3B-E47A-3B747985DC52}"/>
               </a:ext>
             </a:extLst>
           </p:cNvPr>
@@ -12196,7 +12196,7 @@
         <p:cNvPr id="1" name="">
           <a:extLst>
             <a:ext uri="{FF2B5EF4-FFF2-40B4-BE49-F238E27FC236}">
-              <a16:creationId xmlns:a16="http://schemas.microsoft.com/office/drawing/2014/main" xmlns="" id="{E46E94ED-1743-306E-1CA1-9410A2B50996}"/>
+              <a16:creationId xmlns="" xmlns:a16="http://schemas.microsoft.com/office/drawing/2014/main" id="{E46E94ED-1743-306E-1CA1-9410A2B50996}"/>
             </a:ext>
           </a:extLst>
         </p:cNvPr>
@@ -12216,7 +12216,7 @@
           <p:cNvPr id="5" name="Picture 4">
             <a:extLst>
               <a:ext uri="{FF2B5EF4-FFF2-40B4-BE49-F238E27FC236}">
-                <a16:creationId xmlns:a16="http://schemas.microsoft.com/office/drawing/2014/main" xmlns="" id="{04506C61-5206-F1DF-9994-DED24DFB1C65}"/>
+                <a16:creationId xmlns="" xmlns:a16="http://schemas.microsoft.com/office/drawing/2014/main" id="{04506C61-5206-F1DF-9994-DED24DFB1C65}"/>
               </a:ext>
             </a:extLst>
           </p:cNvPr>
@@ -12245,7 +12245,7 @@
           <p:cNvPr id="4" name="Title 3">
             <a:extLst>
               <a:ext uri="{FF2B5EF4-FFF2-40B4-BE49-F238E27FC236}">
-                <a16:creationId xmlns:a16="http://schemas.microsoft.com/office/drawing/2014/main" xmlns="" id="{9B097C2C-D75A-31D4-CD9F-366F39CDE51D}"/>
+                <a16:creationId xmlns="" xmlns:a16="http://schemas.microsoft.com/office/drawing/2014/main" id="{9B097C2C-D75A-31D4-CD9F-366F39CDE51D}"/>
               </a:ext>
             </a:extLst>
           </p:cNvPr>
@@ -12343,7 +12343,7 @@
           <p:cNvPr id="7" name="Text Placeholder 30">
             <a:extLst>
               <a:ext uri="{FF2B5EF4-FFF2-40B4-BE49-F238E27FC236}">
-                <a16:creationId xmlns:a16="http://schemas.microsoft.com/office/drawing/2014/main" xmlns="" id="{B7444DDE-63A3-9721-77CC-C93FED110DAF}"/>
+                <a16:creationId xmlns="" xmlns:a16="http://schemas.microsoft.com/office/drawing/2014/main" id="{B7444DDE-63A3-9721-77CC-C93FED110DAF}"/>
               </a:ext>
             </a:extLst>
           </p:cNvPr>
@@ -12599,7 +12599,7 @@
           <p:cNvPr id="8" name="Text Placeholder 30">
             <a:extLst>
               <a:ext uri="{FF2B5EF4-FFF2-40B4-BE49-F238E27FC236}">
-                <a16:creationId xmlns:a16="http://schemas.microsoft.com/office/drawing/2014/main" xmlns="" id="{2C8A8B73-0C64-E012-F561-D7FE5E322230}"/>
+                <a16:creationId xmlns="" xmlns:a16="http://schemas.microsoft.com/office/drawing/2014/main" id="{2C8A8B73-0C64-E012-F561-D7FE5E322230}"/>
               </a:ext>
             </a:extLst>
           </p:cNvPr>
@@ -13213,7 +13213,7 @@
         <p:cNvPr id="1" name="">
           <a:extLst>
             <a:ext uri="{FF2B5EF4-FFF2-40B4-BE49-F238E27FC236}">
-              <a16:creationId xmlns:a16="http://schemas.microsoft.com/office/drawing/2014/main" xmlns="" id="{327316CE-193E-3D5D-C15A-98517303A13F}"/>
+              <a16:creationId xmlns="" xmlns:a16="http://schemas.microsoft.com/office/drawing/2014/main" id="{327316CE-193E-3D5D-C15A-98517303A13F}"/>
             </a:ext>
           </a:extLst>
         </p:cNvPr>
@@ -13233,7 +13233,7 @@
           <p:cNvPr id="5" name="Picture 4">
             <a:extLst>
               <a:ext uri="{FF2B5EF4-FFF2-40B4-BE49-F238E27FC236}">
-                <a16:creationId xmlns:a16="http://schemas.microsoft.com/office/drawing/2014/main" xmlns="" id="{3D44118A-0276-9E2F-E0E8-85CEE9F1E0C7}"/>
+                <a16:creationId xmlns="" xmlns:a16="http://schemas.microsoft.com/office/drawing/2014/main" id="{3D44118A-0276-9E2F-E0E8-85CEE9F1E0C7}"/>
               </a:ext>
             </a:extLst>
           </p:cNvPr>
@@ -13262,7 +13262,7 @@
           <p:cNvPr id="4" name="Title 3">
             <a:extLst>
               <a:ext uri="{FF2B5EF4-FFF2-40B4-BE49-F238E27FC236}">
-                <a16:creationId xmlns:a16="http://schemas.microsoft.com/office/drawing/2014/main" xmlns="" id="{901A2257-2F98-CB88-038E-C0F1D0A1A363}"/>
+                <a16:creationId xmlns="" xmlns:a16="http://schemas.microsoft.com/office/drawing/2014/main" id="{901A2257-2F98-CB88-038E-C0F1D0A1A363}"/>
               </a:ext>
             </a:extLst>
           </p:cNvPr>
@@ -13297,7 +13297,7 @@
           <p:cNvPr id="7" name="Text Placeholder 30">
             <a:extLst>
               <a:ext uri="{FF2B5EF4-FFF2-40B4-BE49-F238E27FC236}">
-                <a16:creationId xmlns:a16="http://schemas.microsoft.com/office/drawing/2014/main" xmlns="" id="{AF1C8809-654A-4DD1-BB18-87B8B6C020B9}"/>
+                <a16:creationId xmlns="" xmlns:a16="http://schemas.microsoft.com/office/drawing/2014/main" id="{AF1C8809-654A-4DD1-BB18-87B8B6C020B9}"/>
               </a:ext>
             </a:extLst>
           </p:cNvPr>
@@ -13308,8 +13308,8 @@
         </p:nvSpPr>
         <p:spPr>
           <a:xfrm>
-            <a:off x="320982" y="1275371"/>
-            <a:ext cx="3343561" cy="666078"/>
+            <a:off x="-67700" y="1349156"/>
+            <a:ext cx="10562706" cy="666078"/>
           </a:xfrm>
           <a:prstGeom prst="rect">
             <a:avLst/>
@@ -13544,6 +13544,12 @@
             </a:lvl9pPr>
           </a:lstStyle>
           <a:p>
+            <a:r>
+              <a:rPr lang="en-GB" sz="2000" dirty="0" smtClean="0">
+                <a:hlinkClick r:id="rId3"/>
+              </a:rPr>
+              <a:t>https://github.com/chamakurayamini/Seasonal-Agriculture-Performance-Analysis-1.git</a:t>
+            </a:r>
             <a:endParaRPr lang="en-GB" sz="2000" dirty="0"/>
           </a:p>
         </p:txBody>
@@ -13553,7 +13559,7 @@
           <p:cNvPr id="8" name="Text Placeholder 30">
             <a:extLst>
               <a:ext uri="{FF2B5EF4-FFF2-40B4-BE49-F238E27FC236}">
-                <a16:creationId xmlns:a16="http://schemas.microsoft.com/office/drawing/2014/main" xmlns="" id="{0F7D0B46-DEEA-1B5E-FE84-59D11F3B1105}"/>
+                <a16:creationId xmlns="" xmlns:a16="http://schemas.microsoft.com/office/drawing/2014/main" id="{0F7D0B46-DEEA-1B5E-FE84-59D11F3B1105}"/>
               </a:ext>
             </a:extLst>
           </p:cNvPr>
@@ -13934,15 +13940,10 @@
                             </p:stCondLst>
                             <p:childTnLst>
                               <p:par>
-                                <p:cTn id="12" presetID="42" presetClass="entr" presetSubtype="0" fill="hold" grpId="0" nodeType="clickEffect" nodePh="1">
+                                <p:cTn id="12" presetID="42" presetClass="entr" presetSubtype="0" fill="hold" grpId="0" nodeType="clickEffect">
                                   <p:stCondLst>
                                     <p:cond delay="0"/>
                                   </p:stCondLst>
-                                  <p:endCondLst>
-                                    <p:cond evt="begin" delay="0">
-                                      <p:tn val="12"/>
-                                    </p:cond>
-                                  </p:endCondLst>
                                   <p:childTnLst>
                                     <p:set>
                                       <p:cBhvr>
@@ -14167,7 +14168,7 @@
         <p:cNvPr id="1" name="">
           <a:extLst>
             <a:ext uri="{FF2B5EF4-FFF2-40B4-BE49-F238E27FC236}">
-              <a16:creationId xmlns:a16="http://schemas.microsoft.com/office/drawing/2014/main" xmlns="" id="{A5866297-EA5A-44FA-6968-26D32B9B1EAC}"/>
+              <a16:creationId xmlns="" xmlns:a16="http://schemas.microsoft.com/office/drawing/2014/main" id="{A5866297-EA5A-44FA-6968-26D32B9B1EAC}"/>
             </a:ext>
           </a:extLst>
         </p:cNvPr>
@@ -14187,7 +14188,7 @@
           <p:cNvPr id="5" name="Picture 4">
             <a:extLst>
               <a:ext uri="{FF2B5EF4-FFF2-40B4-BE49-F238E27FC236}">
-                <a16:creationId xmlns:a16="http://schemas.microsoft.com/office/drawing/2014/main" xmlns="" id="{5B12FC48-BC6E-8635-A49E-73EF17CEDC01}"/>
+                <a16:creationId xmlns="" xmlns:a16="http://schemas.microsoft.com/office/drawing/2014/main" id="{5B12FC48-BC6E-8635-A49E-73EF17CEDC01}"/>
               </a:ext>
             </a:extLst>
           </p:cNvPr>
@@ -14216,7 +14217,7 @@
           <p:cNvPr id="4" name="Title 3">
             <a:extLst>
               <a:ext uri="{FF2B5EF4-FFF2-40B4-BE49-F238E27FC236}">
-                <a16:creationId xmlns:a16="http://schemas.microsoft.com/office/drawing/2014/main" xmlns="" id="{42B692F6-18B4-BC16-EA0C-48FFBD5621DF}"/>
+                <a16:creationId xmlns="" xmlns:a16="http://schemas.microsoft.com/office/drawing/2014/main" id="{42B692F6-18B4-BC16-EA0C-48FFBD5621DF}"/>
               </a:ext>
             </a:extLst>
           </p:cNvPr>
@@ -14258,7 +14259,7 @@
           <p:cNvPr id="7" name="Text Placeholder 30">
             <a:extLst>
               <a:ext uri="{FF2B5EF4-FFF2-40B4-BE49-F238E27FC236}">
-                <a16:creationId xmlns:a16="http://schemas.microsoft.com/office/drawing/2014/main" xmlns="" id="{069BD300-7A70-B076-3B4C-43081E893162}"/>
+                <a16:creationId xmlns="" xmlns:a16="http://schemas.microsoft.com/office/drawing/2014/main" id="{069BD300-7A70-B076-3B4C-43081E893162}"/>
               </a:ext>
             </a:extLst>
           </p:cNvPr>
@@ -14514,7 +14515,7 @@
           <p:cNvPr id="8" name="Text Placeholder 30">
             <a:extLst>
               <a:ext uri="{FF2B5EF4-FFF2-40B4-BE49-F238E27FC236}">
-                <a16:creationId xmlns:a16="http://schemas.microsoft.com/office/drawing/2014/main" xmlns="" id="{8C1854F2-9914-C22F-FF0B-693CD1D0F966}"/>
+                <a16:creationId xmlns="" xmlns:a16="http://schemas.microsoft.com/office/drawing/2014/main" id="{8C1854F2-9914-C22F-FF0B-693CD1D0F966}"/>
               </a:ext>
             </a:extLst>
           </p:cNvPr>
@@ -15172,7 +15173,7 @@
           <p:cNvPr id="3" name="Title 1">
             <a:extLst>
               <a:ext uri="{FF2B5EF4-FFF2-40B4-BE49-F238E27FC236}">
-                <a16:creationId xmlns:a16="http://schemas.microsoft.com/office/drawing/2014/main" xmlns="" id="{D88C20CF-C1EE-4092-B52D-FD4AB2AB2508}"/>
+                <a16:creationId xmlns="" xmlns:a16="http://schemas.microsoft.com/office/drawing/2014/main" id="{D88C20CF-C1EE-4092-B52D-FD4AB2AB2508}"/>
               </a:ext>
             </a:extLst>
           </p:cNvPr>
@@ -15215,7 +15216,7 @@
           <p:cNvPr id="31" name="Text Placeholder 30">
             <a:extLst>
               <a:ext uri="{FF2B5EF4-FFF2-40B4-BE49-F238E27FC236}">
-                <a16:creationId xmlns:a16="http://schemas.microsoft.com/office/drawing/2014/main" xmlns="" id="{97AB1F14-3A1E-4057-A473-9975BA59F012}"/>
+                <a16:creationId xmlns="" xmlns:a16="http://schemas.microsoft.com/office/drawing/2014/main" id="{97AB1F14-3A1E-4057-A473-9975BA59F012}"/>
               </a:ext>
             </a:extLst>
           </p:cNvPr>
@@ -15250,7 +15251,7 @@
           <p:cNvPr id="17" name="Text Placeholder 28">
             <a:extLst>
               <a:ext uri="{FF2B5EF4-FFF2-40B4-BE49-F238E27FC236}">
-                <a16:creationId xmlns:a16="http://schemas.microsoft.com/office/drawing/2014/main" xmlns="" id="{E212CE24-374D-44D0-8F39-0F5A36E42ED7}"/>
+                <a16:creationId xmlns="" xmlns:a16="http://schemas.microsoft.com/office/drawing/2014/main" id="{E212CE24-374D-44D0-8F39-0F5A36E42ED7}"/>
               </a:ext>
             </a:extLst>
           </p:cNvPr>
@@ -15506,7 +15507,7 @@
           <p:cNvPr id="20" name="Text Placeholder 28">
             <a:extLst>
               <a:ext uri="{FF2B5EF4-FFF2-40B4-BE49-F238E27FC236}">
-                <a16:creationId xmlns:a16="http://schemas.microsoft.com/office/drawing/2014/main" xmlns="" id="{A09A5BC1-0E62-4E6B-A590-951A87D4B4FE}"/>
+                <a16:creationId xmlns="" xmlns:a16="http://schemas.microsoft.com/office/drawing/2014/main" id="{A09A5BC1-0E62-4E6B-A590-951A87D4B4FE}"/>
               </a:ext>
             </a:extLst>
           </p:cNvPr>
@@ -15762,7 +15763,7 @@
           <p:cNvPr id="23" name="Text Placeholder 28">
             <a:extLst>
               <a:ext uri="{FF2B5EF4-FFF2-40B4-BE49-F238E27FC236}">
-                <a16:creationId xmlns:a16="http://schemas.microsoft.com/office/drawing/2014/main" xmlns="" id="{9E6B148F-F3B6-4E6B-9B85-645C039858E8}"/>
+                <a16:creationId xmlns="" xmlns:a16="http://schemas.microsoft.com/office/drawing/2014/main" id="{9E6B148F-F3B6-4E6B-9B85-645C039858E8}"/>
               </a:ext>
             </a:extLst>
           </p:cNvPr>
@@ -16018,7 +16019,7 @@
           <p:cNvPr id="30" name="Text Placeholder 30">
             <a:extLst>
               <a:ext uri="{FF2B5EF4-FFF2-40B4-BE49-F238E27FC236}">
-                <a16:creationId xmlns:a16="http://schemas.microsoft.com/office/drawing/2014/main" xmlns="" id="{D3BF02F6-2753-476A-8046-A85AE3A49748}"/>
+                <a16:creationId xmlns="" xmlns:a16="http://schemas.microsoft.com/office/drawing/2014/main" id="{D3BF02F6-2753-476A-8046-A85AE3A49748}"/>
               </a:ext>
             </a:extLst>
           </p:cNvPr>
@@ -16274,7 +16275,7 @@
           <p:cNvPr id="32" name="Text Placeholder 30">
             <a:extLst>
               <a:ext uri="{FF2B5EF4-FFF2-40B4-BE49-F238E27FC236}">
-                <a16:creationId xmlns:a16="http://schemas.microsoft.com/office/drawing/2014/main" xmlns="" id="{B993AB29-3A3A-4473-8AC8-86E859C97321}"/>
+                <a16:creationId xmlns="" xmlns:a16="http://schemas.microsoft.com/office/drawing/2014/main" id="{B993AB29-3A3A-4473-8AC8-86E859C97321}"/>
               </a:ext>
             </a:extLst>
           </p:cNvPr>
@@ -16533,7 +16534,7 @@
           <p:cNvPr id="15" name="Picture 14">
             <a:extLst>
               <a:ext uri="{FF2B5EF4-FFF2-40B4-BE49-F238E27FC236}">
-                <a16:creationId xmlns:a16="http://schemas.microsoft.com/office/drawing/2014/main" xmlns="" id="{BD3F9E86-2FB3-4DB3-9343-59D594F350A0}"/>
+                <a16:creationId xmlns="" xmlns:a16="http://schemas.microsoft.com/office/drawing/2014/main" id="{BD3F9E86-2FB3-4DB3-9343-59D594F350A0}"/>
               </a:ext>
             </a:extLst>
           </p:cNvPr>
@@ -16562,7 +16563,7 @@
           <p:cNvPr id="12" name="Text Placeholder 11">
             <a:extLst>
               <a:ext uri="{FF2B5EF4-FFF2-40B4-BE49-F238E27FC236}">
-                <a16:creationId xmlns:a16="http://schemas.microsoft.com/office/drawing/2014/main" xmlns="" id="{BC277FD7-925B-4C3D-A364-118403201507}"/>
+                <a16:creationId xmlns="" xmlns:a16="http://schemas.microsoft.com/office/drawing/2014/main" id="{BC277FD7-925B-4C3D-A364-118403201507}"/>
               </a:ext>
             </a:extLst>
           </p:cNvPr>
@@ -17250,7 +17251,7 @@
           <p:cNvPr id="2" name="Text Placeholder 1">
             <a:extLst>
               <a:ext uri="{FF2B5EF4-FFF2-40B4-BE49-F238E27FC236}">
-                <a16:creationId xmlns:a16="http://schemas.microsoft.com/office/drawing/2014/main" xmlns="" id="{E46E4DD1-270B-4C80-AFF0-EB26F132AF36}"/>
+                <a16:creationId xmlns="" xmlns:a16="http://schemas.microsoft.com/office/drawing/2014/main" id="{E46E4DD1-270B-4C80-AFF0-EB26F132AF36}"/>
               </a:ext>
             </a:extLst>
           </p:cNvPr>
@@ -17291,7 +17292,7 @@
           <p:cNvPr id="4" name="Title 3">
             <a:extLst>
               <a:ext uri="{FF2B5EF4-FFF2-40B4-BE49-F238E27FC236}">
-                <a16:creationId xmlns:a16="http://schemas.microsoft.com/office/drawing/2014/main" xmlns="" id="{777CC02B-F7C6-47A8-8C3E-C57C417D9EA3}"/>
+                <a16:creationId xmlns="" xmlns:a16="http://schemas.microsoft.com/office/drawing/2014/main" id="{777CC02B-F7C6-47A8-8C3E-C57C417D9EA3}"/>
               </a:ext>
             </a:extLst>
           </p:cNvPr>
@@ -17327,7 +17328,7 @@
           <p:cNvPr id="5" name="Picture 4">
             <a:extLst>
               <a:ext uri="{FF2B5EF4-FFF2-40B4-BE49-F238E27FC236}">
-                <a16:creationId xmlns:a16="http://schemas.microsoft.com/office/drawing/2014/main" xmlns="" id="{C8FE02DE-D7B2-433D-BFE4-2F564022AD89}"/>
+                <a16:creationId xmlns="" xmlns:a16="http://schemas.microsoft.com/office/drawing/2014/main" id="{C8FE02DE-D7B2-433D-BFE4-2F564022AD89}"/>
               </a:ext>
             </a:extLst>
           </p:cNvPr>
@@ -17357,7 +17358,7 @@
           <p:cNvPr id="6" name="Picture 5">
             <a:extLst>
               <a:ext uri="{FF2B5EF4-FFF2-40B4-BE49-F238E27FC236}">
-                <a16:creationId xmlns:a16="http://schemas.microsoft.com/office/drawing/2014/main" xmlns="" id="{736DEFE3-051A-494A-949C-BB2FF86F9ED7}"/>
+                <a16:creationId xmlns="" xmlns:a16="http://schemas.microsoft.com/office/drawing/2014/main" id="{736DEFE3-051A-494A-949C-BB2FF86F9ED7}"/>
               </a:ext>
             </a:extLst>
           </p:cNvPr>
@@ -17674,7 +17675,7 @@
           <p:cNvPr id="3" name="Title 2">
             <a:extLst>
               <a:ext uri="{FF2B5EF4-FFF2-40B4-BE49-F238E27FC236}">
-                <a16:creationId xmlns:a16="http://schemas.microsoft.com/office/drawing/2014/main" xmlns="" id="{EBF2FBC7-3552-4F01-BB27-8BEEE74F7277}"/>
+                <a16:creationId xmlns="" xmlns:a16="http://schemas.microsoft.com/office/drawing/2014/main" id="{EBF2FBC7-3552-4F01-BB27-8BEEE74F7277}"/>
               </a:ext>
             </a:extLst>
           </p:cNvPr>
@@ -17762,7 +17763,7 @@
           <p:cNvPr id="5" name="Picture 4">
             <a:extLst>
               <a:ext uri="{FF2B5EF4-FFF2-40B4-BE49-F238E27FC236}">
-                <a16:creationId xmlns:a16="http://schemas.microsoft.com/office/drawing/2014/main" xmlns="" id="{09D8A2BA-6C1D-4A33-85F2-E44A4FF54A1C}"/>
+                <a16:creationId xmlns="" xmlns:a16="http://schemas.microsoft.com/office/drawing/2014/main" id="{09D8A2BA-6C1D-4A33-85F2-E44A4FF54A1C}"/>
               </a:ext>
             </a:extLst>
           </p:cNvPr>
@@ -17791,7 +17792,7 @@
           <p:cNvPr id="6" name="Picture 5">
             <a:extLst>
               <a:ext uri="{FF2B5EF4-FFF2-40B4-BE49-F238E27FC236}">
-                <a16:creationId xmlns:a16="http://schemas.microsoft.com/office/drawing/2014/main" xmlns="" id="{6BED3D6A-DC10-4985-B01B-735F2CBA6E47}"/>
+                <a16:creationId xmlns="" xmlns:a16="http://schemas.microsoft.com/office/drawing/2014/main" id="{6BED3D6A-DC10-4985-B01B-735F2CBA6E47}"/>
               </a:ext>
             </a:extLst>
           </p:cNvPr>
@@ -17983,7 +17984,7 @@
           <p:cNvPr id="2" name="Text Placeholder 1">
             <a:extLst>
               <a:ext uri="{FF2B5EF4-FFF2-40B4-BE49-F238E27FC236}">
-                <a16:creationId xmlns:a16="http://schemas.microsoft.com/office/drawing/2014/main" xmlns="" id="{664E3B60-2780-459A-8583-F095D5E7463A}"/>
+                <a16:creationId xmlns="" xmlns:a16="http://schemas.microsoft.com/office/drawing/2014/main" id="{664E3B60-2780-459A-8583-F095D5E7463A}"/>
               </a:ext>
             </a:extLst>
           </p:cNvPr>
@@ -18071,7 +18072,7 @@
           <p:cNvPr id="4" name="Title 3">
             <a:extLst>
               <a:ext uri="{FF2B5EF4-FFF2-40B4-BE49-F238E27FC236}">
-                <a16:creationId xmlns:a16="http://schemas.microsoft.com/office/drawing/2014/main" xmlns="" id="{1A4A072B-83C6-4607-AE6A-5AD61CC72C44}"/>
+                <a16:creationId xmlns="" xmlns:a16="http://schemas.microsoft.com/office/drawing/2014/main" id="{1A4A072B-83C6-4607-AE6A-5AD61CC72C44}"/>
               </a:ext>
             </a:extLst>
           </p:cNvPr>
@@ -18107,7 +18108,7 @@
           <p:cNvPr id="6" name="Picture 5">
             <a:extLst>
               <a:ext uri="{FF2B5EF4-FFF2-40B4-BE49-F238E27FC236}">
-                <a16:creationId xmlns:a16="http://schemas.microsoft.com/office/drawing/2014/main" xmlns="" id="{E8B153BB-61B9-403F-8AE5-F75400450AC0}"/>
+                <a16:creationId xmlns="" xmlns:a16="http://schemas.microsoft.com/office/drawing/2014/main" id="{E8B153BB-61B9-403F-8AE5-F75400450AC0}"/>
               </a:ext>
             </a:extLst>
           </p:cNvPr>
@@ -18655,7 +18656,7 @@
           <p:cNvPr id="6" name="Picture 5">
             <a:extLst>
               <a:ext uri="{FF2B5EF4-FFF2-40B4-BE49-F238E27FC236}">
-                <a16:creationId xmlns:a16="http://schemas.microsoft.com/office/drawing/2014/main" xmlns="" id="{0B7C27C4-3E14-490A-B132-CBBEDA1E905A}"/>
+                <a16:creationId xmlns="" xmlns:a16="http://schemas.microsoft.com/office/drawing/2014/main" id="{0B7C27C4-3E14-490A-B132-CBBEDA1E905A}"/>
               </a:ext>
             </a:extLst>
           </p:cNvPr>
@@ -18685,7 +18686,7 @@
           <p:cNvPr id="2" name="Picture 1">
             <a:extLst>
               <a:ext uri="{FF2B5EF4-FFF2-40B4-BE49-F238E27FC236}">
-                <a16:creationId xmlns:a16="http://schemas.microsoft.com/office/drawing/2014/main" xmlns="" id="{F1FC3E39-8C60-4F64-9838-2A683F25B8C4}"/>
+                <a16:creationId xmlns="" xmlns:a16="http://schemas.microsoft.com/office/drawing/2014/main" id="{F1FC3E39-8C60-4F64-9838-2A683F25B8C4}"/>
               </a:ext>
             </a:extLst>
           </p:cNvPr>
@@ -18715,7 +18716,7 @@
           <p:cNvPr id="7" name="Text Placeholder 6">
             <a:extLst>
               <a:ext uri="{FF2B5EF4-FFF2-40B4-BE49-F238E27FC236}">
-                <a16:creationId xmlns:a16="http://schemas.microsoft.com/office/drawing/2014/main" xmlns="" id="{B21C28F5-3CA3-4B78-B5C9-550C00BB3174}"/>
+                <a16:creationId xmlns="" xmlns:a16="http://schemas.microsoft.com/office/drawing/2014/main" id="{B21C28F5-3CA3-4B78-B5C9-550C00BB3174}"/>
               </a:ext>
             </a:extLst>
           </p:cNvPr>
@@ -18802,7 +18803,7 @@
           <p:cNvPr id="9" name="Title 8">
             <a:extLst>
               <a:ext uri="{FF2B5EF4-FFF2-40B4-BE49-F238E27FC236}">
-                <a16:creationId xmlns:a16="http://schemas.microsoft.com/office/drawing/2014/main" xmlns="" id="{FEF304F5-32C5-4869-B185-859B567855A8}"/>
+                <a16:creationId xmlns="" xmlns:a16="http://schemas.microsoft.com/office/drawing/2014/main" id="{FEF304F5-32C5-4869-B185-859B567855A8}"/>
               </a:ext>
             </a:extLst>
           </p:cNvPr>
@@ -19575,7 +19576,7 @@
           <p:cNvPr id="5" name="Picture 4">
             <a:extLst>
               <a:ext uri="{FF2B5EF4-FFF2-40B4-BE49-F238E27FC236}">
-                <a16:creationId xmlns:a16="http://schemas.microsoft.com/office/drawing/2014/main" xmlns="" id="{BBB0C869-7C5C-4070-BD4D-F3FC2DA8F301}"/>
+                <a16:creationId xmlns="" xmlns:a16="http://schemas.microsoft.com/office/drawing/2014/main" id="{BBB0C869-7C5C-4070-BD4D-F3FC2DA8F301}"/>
               </a:ext>
             </a:extLst>
           </p:cNvPr>
@@ -19604,7 +19605,7 @@
           <p:cNvPr id="4" name="Title 3">
             <a:extLst>
               <a:ext uri="{FF2B5EF4-FFF2-40B4-BE49-F238E27FC236}">
-                <a16:creationId xmlns:a16="http://schemas.microsoft.com/office/drawing/2014/main" xmlns="" id="{AFE3A2AF-177E-45E6-A191-0F8523DB7FFA}"/>
+                <a16:creationId xmlns="" xmlns:a16="http://schemas.microsoft.com/office/drawing/2014/main" id="{AFE3A2AF-177E-45E6-A191-0F8523DB7FFA}"/>
               </a:ext>
             </a:extLst>
           </p:cNvPr>
@@ -19654,7 +19655,7 @@
           <p:cNvPr id="7" name="Text Placeholder 30">
             <a:extLst>
               <a:ext uri="{FF2B5EF4-FFF2-40B4-BE49-F238E27FC236}">
-                <a16:creationId xmlns:a16="http://schemas.microsoft.com/office/drawing/2014/main" xmlns="" id="{372426BE-BEE7-4A6D-BCD2-059615BBCE25}"/>
+                <a16:creationId xmlns="" xmlns:a16="http://schemas.microsoft.com/office/drawing/2014/main" id="{372426BE-BEE7-4A6D-BCD2-059615BBCE25}"/>
               </a:ext>
             </a:extLst>
           </p:cNvPr>
@@ -19910,7 +19911,7 @@
           <p:cNvPr id="8" name="Text Placeholder 30">
             <a:extLst>
               <a:ext uri="{FF2B5EF4-FFF2-40B4-BE49-F238E27FC236}">
-                <a16:creationId xmlns:a16="http://schemas.microsoft.com/office/drawing/2014/main" xmlns="" id="{E61E227A-5883-4C77-B25A-46A22FFDF41F}"/>
+                <a16:creationId xmlns="" xmlns:a16="http://schemas.microsoft.com/office/drawing/2014/main" id="{E61E227A-5883-4C77-B25A-46A22FFDF41F}"/>
               </a:ext>
             </a:extLst>
           </p:cNvPr>
@@ -20614,7 +20615,7 @@
         <p:cNvPr id="1" name="">
           <a:extLst>
             <a:ext uri="{FF2B5EF4-FFF2-40B4-BE49-F238E27FC236}">
-              <a16:creationId xmlns:a16="http://schemas.microsoft.com/office/drawing/2014/main" xmlns="" id="{B9EAAE43-B138-25CD-D01F-41DB388556CE}"/>
+              <a16:creationId xmlns="" xmlns:a16="http://schemas.microsoft.com/office/drawing/2014/main" id="{B9EAAE43-B138-25CD-D01F-41DB388556CE}"/>
             </a:ext>
           </a:extLst>
         </p:cNvPr>
@@ -20634,7 +20635,7 @@
           <p:cNvPr id="5" name="Picture 4">
             <a:extLst>
               <a:ext uri="{FF2B5EF4-FFF2-40B4-BE49-F238E27FC236}">
-                <a16:creationId xmlns:a16="http://schemas.microsoft.com/office/drawing/2014/main" xmlns="" id="{BFCF24DA-3CDC-4D87-9335-AB913C783F76}"/>
+                <a16:creationId xmlns="" xmlns:a16="http://schemas.microsoft.com/office/drawing/2014/main" id="{BFCF24DA-3CDC-4D87-9335-AB913C783F76}"/>
               </a:ext>
             </a:extLst>
           </p:cNvPr>
@@ -20663,7 +20664,7 @@
           <p:cNvPr id="4" name="Title 3">
             <a:extLst>
               <a:ext uri="{FF2B5EF4-FFF2-40B4-BE49-F238E27FC236}">
-                <a16:creationId xmlns:a16="http://schemas.microsoft.com/office/drawing/2014/main" xmlns="" id="{6D5AF756-BADB-9E87-14AC-F87A8C7463BF}"/>
+                <a16:creationId xmlns="" xmlns:a16="http://schemas.microsoft.com/office/drawing/2014/main" id="{6D5AF756-BADB-9E87-14AC-F87A8C7463BF}"/>
               </a:ext>
             </a:extLst>
           </p:cNvPr>
@@ -20699,7 +20700,7 @@
           <p:cNvPr id="7" name="Text Placeholder 30">
             <a:extLst>
               <a:ext uri="{FF2B5EF4-FFF2-40B4-BE49-F238E27FC236}">
-                <a16:creationId xmlns:a16="http://schemas.microsoft.com/office/drawing/2014/main" xmlns="" id="{4716F3BA-AE41-9B35-3BCA-353F205375D1}"/>
+                <a16:creationId xmlns="" xmlns:a16="http://schemas.microsoft.com/office/drawing/2014/main" id="{4716F3BA-AE41-9B35-3BCA-353F205375D1}"/>
               </a:ext>
             </a:extLst>
           </p:cNvPr>
@@ -20955,7 +20956,7 @@
           <p:cNvPr id="8" name="Text Placeholder 30">
             <a:extLst>
               <a:ext uri="{FF2B5EF4-FFF2-40B4-BE49-F238E27FC236}">
-                <a16:creationId xmlns:a16="http://schemas.microsoft.com/office/drawing/2014/main" xmlns="" id="{0E149068-B429-662F-714A-0DD8CE171A51}"/>
+                <a16:creationId xmlns="" xmlns:a16="http://schemas.microsoft.com/office/drawing/2014/main" id="{0E149068-B429-662F-714A-0DD8CE171A51}"/>
               </a:ext>
             </a:extLst>
           </p:cNvPr>
@@ -21211,7 +21212,7 @@
           <p:cNvPr id="10" name="Text Placeholder 1">
             <a:extLst>
               <a:ext uri="{FF2B5EF4-FFF2-40B4-BE49-F238E27FC236}">
-                <a16:creationId xmlns:a16="http://schemas.microsoft.com/office/drawing/2014/main" xmlns="" id="{3A64DB11-806F-1A4C-E0D5-D745D29CED50}"/>
+                <a16:creationId xmlns="" xmlns:a16="http://schemas.microsoft.com/office/drawing/2014/main" id="{3A64DB11-806F-1A4C-E0D5-D745D29CED50}"/>
               </a:ext>
             </a:extLst>
           </p:cNvPr>
@@ -21813,7 +21814,7 @@
         <p:cNvPr id="1" name="">
           <a:extLst>
             <a:ext uri="{FF2B5EF4-FFF2-40B4-BE49-F238E27FC236}">
-              <a16:creationId xmlns:a16="http://schemas.microsoft.com/office/drawing/2014/main" xmlns="" id="{16F9E943-C59C-1D86-29CA-F786C47BABA8}"/>
+              <a16:creationId xmlns="" xmlns:a16="http://schemas.microsoft.com/office/drawing/2014/main" id="{16F9E943-C59C-1D86-29CA-F786C47BABA8}"/>
             </a:ext>
           </a:extLst>
         </p:cNvPr>
@@ -21833,7 +21834,7 @@
           <p:cNvPr id="5" name="Picture 4">
             <a:extLst>
               <a:ext uri="{FF2B5EF4-FFF2-40B4-BE49-F238E27FC236}">
-                <a16:creationId xmlns:a16="http://schemas.microsoft.com/office/drawing/2014/main" xmlns="" id="{BEC6E6C7-69F2-D361-F3CC-FC5268D9BC87}"/>
+                <a16:creationId xmlns="" xmlns:a16="http://schemas.microsoft.com/office/drawing/2014/main" id="{BEC6E6C7-69F2-D361-F3CC-FC5268D9BC87}"/>
               </a:ext>
             </a:extLst>
           </p:cNvPr>
@@ -21862,7 +21863,7 @@
           <p:cNvPr id="4" name="Title 3">
             <a:extLst>
               <a:ext uri="{FF2B5EF4-FFF2-40B4-BE49-F238E27FC236}">
-                <a16:creationId xmlns:a16="http://schemas.microsoft.com/office/drawing/2014/main" xmlns="" id="{DFCD5524-F764-DC63-6F54-D48057CF17B7}"/>
+                <a16:creationId xmlns="" xmlns:a16="http://schemas.microsoft.com/office/drawing/2014/main" id="{DFCD5524-F764-DC63-6F54-D48057CF17B7}"/>
               </a:ext>
             </a:extLst>
           </p:cNvPr>
@@ -21898,7 +21899,7 @@
           <p:cNvPr id="7" name="Text Placeholder 30">
             <a:extLst>
               <a:ext uri="{FF2B5EF4-FFF2-40B4-BE49-F238E27FC236}">
-                <a16:creationId xmlns:a16="http://schemas.microsoft.com/office/drawing/2014/main" xmlns="" id="{4B1E3463-DEAD-53DD-2AC0-E8A458421D0B}"/>
+                <a16:creationId xmlns="" xmlns:a16="http://schemas.microsoft.com/office/drawing/2014/main" id="{4B1E3463-DEAD-53DD-2AC0-E8A458421D0B}"/>
               </a:ext>
             </a:extLst>
           </p:cNvPr>
@@ -22154,7 +22155,7 @@
           <p:cNvPr id="8" name="Text Placeholder 30">
             <a:extLst>
               <a:ext uri="{FF2B5EF4-FFF2-40B4-BE49-F238E27FC236}">
-                <a16:creationId xmlns:a16="http://schemas.microsoft.com/office/drawing/2014/main" xmlns="" id="{B713140B-3822-90E0-F216-B77A695B86B5}"/>
+                <a16:creationId xmlns="" xmlns:a16="http://schemas.microsoft.com/office/drawing/2014/main" id="{B713140B-3822-90E0-F216-B77A695B86B5}"/>
               </a:ext>
             </a:extLst>
           </p:cNvPr>
@@ -22882,7 +22883,7 @@
         <p:cNvPr id="1" name="">
           <a:extLst>
             <a:ext uri="{FF2B5EF4-FFF2-40B4-BE49-F238E27FC236}">
-              <a16:creationId xmlns:a16="http://schemas.microsoft.com/office/drawing/2014/main" xmlns="" id="{DA05AC1B-54F8-474D-6B86-CF23FDF34B0B}"/>
+              <a16:creationId xmlns="" xmlns:a16="http://schemas.microsoft.com/office/drawing/2014/main" id="{DA05AC1B-54F8-474D-6B86-CF23FDF34B0B}"/>
             </a:ext>
           </a:extLst>
         </p:cNvPr>
@@ -22902,7 +22903,7 @@
           <p:cNvPr id="5" name="Picture 4">
             <a:extLst>
               <a:ext uri="{FF2B5EF4-FFF2-40B4-BE49-F238E27FC236}">
-                <a16:creationId xmlns:a16="http://schemas.microsoft.com/office/drawing/2014/main" xmlns="" id="{E9D7CE81-8696-30A4-F33E-B4B569D35025}"/>
+                <a16:creationId xmlns="" xmlns:a16="http://schemas.microsoft.com/office/drawing/2014/main" id="{E9D7CE81-8696-30A4-F33E-B4B569D35025}"/>
               </a:ext>
             </a:extLst>
           </p:cNvPr>
@@ -22931,7 +22932,7 @@
           <p:cNvPr id="4" name="Title 3">
             <a:extLst>
               <a:ext uri="{FF2B5EF4-FFF2-40B4-BE49-F238E27FC236}">
-                <a16:creationId xmlns:a16="http://schemas.microsoft.com/office/drawing/2014/main" xmlns="" id="{15FD49EE-0956-AAE3-737B-15F7D4267C1A}"/>
+                <a16:creationId xmlns="" xmlns:a16="http://schemas.microsoft.com/office/drawing/2014/main" id="{15FD49EE-0956-AAE3-737B-15F7D4267C1A}"/>
               </a:ext>
             </a:extLst>
           </p:cNvPr>
@@ -22967,7 +22968,7 @@
           <p:cNvPr id="7" name="Text Placeholder 30">
             <a:extLst>
               <a:ext uri="{FF2B5EF4-FFF2-40B4-BE49-F238E27FC236}">
-                <a16:creationId xmlns:a16="http://schemas.microsoft.com/office/drawing/2014/main" xmlns="" id="{D224F8B1-34DD-5A54-7F70-25EBA532E6E1}"/>
+                <a16:creationId xmlns="" xmlns:a16="http://schemas.microsoft.com/office/drawing/2014/main" id="{D224F8B1-34DD-5A54-7F70-25EBA532E6E1}"/>
               </a:ext>
             </a:extLst>
           </p:cNvPr>
@@ -23223,7 +23224,7 @@
           <p:cNvPr id="8" name="Text Placeholder 30">
             <a:extLst>
               <a:ext uri="{FF2B5EF4-FFF2-40B4-BE49-F238E27FC236}">
-                <a16:creationId xmlns:a16="http://schemas.microsoft.com/office/drawing/2014/main" xmlns="" id="{25A36120-3EFF-6A69-8D23-42BFD883ADDA}"/>
+                <a16:creationId xmlns="" xmlns:a16="http://schemas.microsoft.com/office/drawing/2014/main" id="{25A36120-3EFF-6A69-8D23-42BFD883ADDA}"/>
               </a:ext>
             </a:extLst>
           </p:cNvPr>
@@ -23479,7 +23480,7 @@
           <p:cNvPr id="10" name="Text Placeholder 1">
             <a:extLst>
               <a:ext uri="{FF2B5EF4-FFF2-40B4-BE49-F238E27FC236}">
-                <a16:creationId xmlns:a16="http://schemas.microsoft.com/office/drawing/2014/main" xmlns="" id="{2B7B89A1-9444-8322-CADC-42D31D698FA8}"/>
+                <a16:creationId xmlns="" xmlns:a16="http://schemas.microsoft.com/office/drawing/2014/main" id="{2B7B89A1-9444-8322-CADC-42D31D698FA8}"/>
               </a:ext>
             </a:extLst>
           </p:cNvPr>
@@ -24891,15 +24892,6 @@
 </file>
 
 <file path=customXml/item1.xml><?xml version="1.0" encoding="utf-8"?>
-<p:properties xmlns:p="http://schemas.microsoft.com/office/2006/metadata/properties" xmlns:xsi="http://www.w3.org/2001/XMLSchema-instance" xmlns:pc="http://schemas.microsoft.com/office/infopath/2007/PartnerControls">
-  <documentManagement>
-    <Status xmlns="71af3243-3dd4-4a8d-8c0d-dd76da1f02a5">Not started</Status>
-    <MediaServiceKeyPoints xmlns="71af3243-3dd4-4a8d-8c0d-dd76da1f02a5" xsi:nil="true"/>
-  </documentManagement>
-</p:properties>
-</file>
-
-<file path=customXml/item2.xml><?xml version="1.0" encoding="utf-8"?>
 <ct:contentTypeSchema xmlns:ct="http://schemas.microsoft.com/office/2006/metadata/contentType" xmlns:ma="http://schemas.microsoft.com/office/2006/metadata/properties/metaAttributes" ct:_="" ma:_="" ma:contentTypeName="Document" ma:contentTypeID="0x01010079F111ED35F8CC479449609E8A0923A6" ma:contentTypeVersion="12" ma:contentTypeDescription="Create a new document." ma:contentTypeScope="" ma:versionID="426e97fa315356fffbdcd9876fe988c2">
   <xsd:schema xmlns:xsd="http://www.w3.org/2001/XMLSchema" xmlns:xs="http://www.w3.org/2001/XMLSchema" xmlns:p="http://schemas.microsoft.com/office/2006/metadata/properties" xmlns:ns2="71af3243-3dd4-4a8d-8c0d-dd76da1f02a5" xmlns:ns3="16c05727-aa75-4e4a-9b5f-8a80a1165891" targetNamespace="http://schemas.microsoft.com/office/2006/metadata/properties" ma:root="true" ma:fieldsID="14b8f0def80e6d70ce3def20c90759ae" ns2:_="" ns3:_="">
     <xsd:import namespace="71af3243-3dd4-4a8d-8c0d-dd76da1f02a5"/>
@@ -25120,6 +25112,15 @@
 </ct:contentTypeSchema>
 </file>
 
+<file path=customXml/item2.xml><?xml version="1.0" encoding="utf-8"?>
+<p:properties xmlns:p="http://schemas.microsoft.com/office/2006/metadata/properties" xmlns:xsi="http://www.w3.org/2001/XMLSchema-instance" xmlns:pc="http://schemas.microsoft.com/office/infopath/2007/PartnerControls">
+  <documentManagement>
+    <Status xmlns="71af3243-3dd4-4a8d-8c0d-dd76da1f02a5">Not started</Status>
+    <MediaServiceKeyPoints xmlns="71af3243-3dd4-4a8d-8c0d-dd76da1f02a5" xsi:nil="true"/>
+  </documentManagement>
+</p:properties>
+</file>
+
 <file path=customXml/item3.xml><?xml version="1.0" encoding="utf-8"?>
 <?mso-contentType ?>
 <FormTemplates xmlns="http://schemas.microsoft.com/sharepoint/v3/contenttype/forms">
@@ -25130,23 +25131,6 @@
 </file>
 
 <file path=customXml/itemProps1.xml><?xml version="1.0" encoding="utf-8"?>
-<ds:datastoreItem xmlns:ds="http://schemas.openxmlformats.org/officeDocument/2006/customXml" ds:itemID="{4DEA9014-ED64-4558-B1E1-D03F0EE32BEB}">
-  <ds:schemaRefs>
-    <ds:schemaRef ds:uri="http://purl.org/dc/dcmitype/"/>
-    <ds:schemaRef ds:uri="http://purl.org/dc/elements/1.1/"/>
-    <ds:schemaRef ds:uri="http://schemas.microsoft.com/office/2006/metadata/properties"/>
-    <ds:schemaRef ds:uri="http://schemas.microsoft.com/office/2006/documentManagement/types"/>
-    <ds:schemaRef ds:uri="http://purl.org/dc/terms/"/>
-    <ds:schemaRef ds:uri="http://schemas.openxmlformats.org/package/2006/metadata/core-properties"/>
-    <ds:schemaRef ds:uri="16c05727-aa75-4e4a-9b5f-8a80a1165891"/>
-    <ds:schemaRef ds:uri="http://schemas.microsoft.com/office/infopath/2007/PartnerControls"/>
-    <ds:schemaRef ds:uri="71af3243-3dd4-4a8d-8c0d-dd76da1f02a5"/>
-    <ds:schemaRef ds:uri="http://www.w3.org/XML/1998/namespace"/>
-  </ds:schemaRefs>
-</ds:datastoreItem>
-</file>
-
-<file path=customXml/itemProps2.xml><?xml version="1.0" encoding="utf-8"?>
 <ds:datastoreItem xmlns:ds="http://schemas.openxmlformats.org/officeDocument/2006/customXml" ds:itemID="{B19EB750-A6DA-4BE8-B87B-FC499FE73360}">
   <ds:schemaRefs>
     <ds:schemaRef ds:uri="http://schemas.microsoft.com/office/2006/metadata/contentType"/>
@@ -25165,6 +25149,23 @@
 </ds:datastoreItem>
 </file>
 
+<file path=customXml/itemProps2.xml><?xml version="1.0" encoding="utf-8"?>
+<ds:datastoreItem xmlns:ds="http://schemas.openxmlformats.org/officeDocument/2006/customXml" ds:itemID="{4DEA9014-ED64-4558-B1E1-D03F0EE32BEB}">
+  <ds:schemaRefs>
+    <ds:schemaRef ds:uri="http://purl.org/dc/dcmitype/"/>
+    <ds:schemaRef ds:uri="http://purl.org/dc/elements/1.1/"/>
+    <ds:schemaRef ds:uri="http://schemas.microsoft.com/office/2006/metadata/properties"/>
+    <ds:schemaRef ds:uri="http://schemas.microsoft.com/office/2006/documentManagement/types"/>
+    <ds:schemaRef ds:uri="http://purl.org/dc/terms/"/>
+    <ds:schemaRef ds:uri="http://schemas.openxmlformats.org/package/2006/metadata/core-properties"/>
+    <ds:schemaRef ds:uri="16c05727-aa75-4e4a-9b5f-8a80a1165891"/>
+    <ds:schemaRef ds:uri="http://schemas.microsoft.com/office/infopath/2007/PartnerControls"/>
+    <ds:schemaRef ds:uri="71af3243-3dd4-4a8d-8c0d-dd76da1f02a5"/>
+    <ds:schemaRef ds:uri="http://www.w3.org/XML/1998/namespace"/>
+  </ds:schemaRefs>
+</ds:datastoreItem>
+</file>
+
 <file path=customXml/itemProps3.xml><?xml version="1.0" encoding="utf-8"?>
 <ds:datastoreItem xmlns:ds="http://schemas.openxmlformats.org/officeDocument/2006/customXml" ds:itemID="{05D99ABA-76CE-4A8E-B5F0-C051B96628DE}">
   <ds:schemaRefs>
